--- a/docs/presentations/nachalo-kak-rabotaet-platforma.pptx
+++ b/docs/presentations/nachalo-kak-rabotaet-platforma.pptx
@@ -10945,7 +10945,7 @@
                 <a:ea typeface="Calibri" pitchFamily="34" charset="-122"/>
                 <a:cs typeface="Calibri" pitchFamily="34" charset="-120"/>
               </a:rPr>
-              <a:t>Одна вещь, о которой лучше договориться заранее, чтобы на демо не оказалось документов, с которыми платформа не сможет работать.</a:t>
+              <a:t>У платформы два канала обработки — знать заранее, что куда попадёт, полезно для подготовки демонстрации.</a:t>
             </a:r>
             <a:endParaRPr lang="en-US" sz="1350" dirty="0"/>
           </a:p>
@@ -11115,14 +11115,9 @@
             </a:avLst>
           </a:prstGeom>
           <a:solidFill>
-            <a:srgbClr val="FBEAE5"/>
+            <a:srgbClr val="E4EFF0"/>
           </a:solidFill>
-          <a:ln w="12700">
-            <a:solidFill>
-              <a:srgbClr val="F0C6BB"/>
-            </a:solidFill>
-            <a:prstDash val="solid"/>
-          </a:ln>
+          <a:ln/>
         </p:spPr>
       </p:sp>
       <p:sp>
@@ -11140,7 +11135,7 @@
             <a:avLst/>
           </a:prstGeom>
           <a:solidFill>
-            <a:srgbClr val="E4573C"/>
+            <a:srgbClr val="0E6F7A"/>
           </a:solidFill>
           <a:ln/>
         </p:spPr>
@@ -11205,7 +11200,7 @@
                 <a:ea typeface="Calibri" pitchFamily="34" charset="-122"/>
                 <a:cs typeface="Calibri" pitchFamily="34" charset="-120"/>
               </a:rPr>
-              <a:t>Не подойдёт: сканы без текстового слоя</a:t>
+              <a:t>Сканы и фото — отдельным каналом</a:t>
             </a:r>
             <a:endParaRPr lang="en-US" sz="1700" dirty="0"/>
           </a:p>
@@ -11241,13 +11236,13 @@
             <a:r>
               <a:rPr lang="en-US" sz="1250" dirty="0">
                 <a:solidFill>
-                  <a:srgbClr val="8C3020"/>
-                </a:solidFill>
-                <a:latin typeface="Calibri" pitchFamily="34" charset="0"/>
-                <a:ea typeface="Calibri" pitchFamily="34" charset="-122"/>
-                <a:cs typeface="Calibri" pitchFamily="34" charset="-120"/>
-              </a:rPr>
-              <a:t>Скан или фотография страницы — для платформы просто картинка. Распознавание текста с изображений не поддерживается: такой документ будет помечен как необработанный и в поиск не попадёт.</a:t>
+                  <a:srgbClr val="1C4A50"/>
+                </a:solidFill>
+                <a:latin typeface="Calibri" pitchFamily="34" charset="0"/>
+                <a:ea typeface="Calibri" pitchFamily="34" charset="-122"/>
+                <a:cs typeface="Calibri" pitchFamily="34" charset="-120"/>
+              </a:rPr>
+              <a:t>Скан или фотография страницы — тоже не проблема: их «читает» отдельная визуальная модель, а не обычный текстовый поиск. Работает иначе и чуть медленнее — если хотите показать и такие документы на демо, скажите заранее, включим сценарий отдельно.</a:t>
             </a:r>
             <a:endParaRPr lang="en-US" sz="1250" dirty="0"/>
           </a:p>
@@ -11414,7 +11409,7 @@
                 <a:ea typeface="Calibri" pitchFamily="34" charset="-122"/>
                 <a:cs typeface="Calibri" pitchFamily="34" charset="-120"/>
               </a:rPr>
-              <a:t>Откройте несколько документов и попробуйте выделить текст мышью. Не выделяется — это картинка.</a:t>
+              <a:t>Отметьте, где текст, а где скан или фото, — так сразу понятно, что пойдёт через обычный поиск, а что через визуальный канал.</a:t>
             </a:r>
             <a:endParaRPr lang="en-US" sz="1100" dirty="0"/>
           </a:p>

--- a/docs/presentations/nachalo-kak-rabotaet-platforma.pptx
+++ b/docs/presentations/nachalo-kak-rabotaet-platforma.pptx
@@ -10960,11 +10960,11 @@
         <p:spPr>
           <a:xfrm>
             <a:off x="685800" y="1965960"/>
-            <a:ext cx="5227168" cy="2286000"/>
+            <a:ext cx="5227168" cy="2377440"/>
           </a:xfrm>
           <a:prstGeom prst="roundRect">
             <a:avLst>
-              <a:gd name="adj" fmla="val 3600"/>
+              <a:gd name="adj" fmla="val 3462"/>
             </a:avLst>
           </a:prstGeom>
           <a:solidFill>
@@ -10981,7 +10981,7 @@
         </p:nvSpPr>
         <p:spPr>
           <a:xfrm>
-            <a:off x="1033272" y="2267712"/>
+            <a:off x="1033272" y="2249424"/>
             <a:ext cx="566928" cy="566928"/>
           </a:xfrm>
           <a:prstGeom prst="ellipse">
@@ -11009,7 +11009,7 @@
         </p:blipFill>
         <p:spPr>
           <a:xfrm>
-            <a:off x="1175004" y="2409444"/>
+            <a:off x="1175004" y="2391156"/>
             <a:ext cx="283464" cy="283464"/>
           </a:xfrm>
           <a:prstGeom prst="rect">
@@ -11025,20 +11025,23 @@
         </p:nvSpPr>
         <p:spPr>
           <a:xfrm>
-            <a:off x="1728216" y="2286000"/>
-            <a:ext cx="3855568" cy="365760"/>
-          </a:xfrm>
-          <a:prstGeom prst="rect">
-            <a:avLst/>
-          </a:prstGeom>
-          <a:noFill/>
-          <a:ln/>
-        </p:spPr>
-        <p:txBody>
-          <a:bodyPr wrap="square" lIns="0" tIns="0" rIns="0" bIns="0" rtlCol="0" anchor="ctr"/>
-          <a:lstStyle/>
-          <a:p>
-            <a:pPr indent="0" marL="0">
+            <a:off x="1728216" y="2231136"/>
+            <a:ext cx="3855568" cy="603504"/>
+          </a:xfrm>
+          <a:prstGeom prst="rect">
+            <a:avLst/>
+          </a:prstGeom>
+          <a:noFill/>
+          <a:ln/>
+        </p:spPr>
+        <p:txBody>
+          <a:bodyPr wrap="square" lIns="0" tIns="0" rIns="0" bIns="0" rtlCol="0" anchor="ctr"/>
+          <a:lstStyle/>
+          <a:p>
+            <a:pPr indent="0" marL="0">
+              <a:lnSpc>
+                <a:spcPct val="95000"/>
+              </a:lnSpc>
               <a:buNone/>
             </a:pPr>
             <a:r>
@@ -11064,17 +11067,17 @@
         </p:nvSpPr>
         <p:spPr>
           <a:xfrm>
-            <a:off x="1033272" y="2999232"/>
-            <a:ext cx="4532224" cy="1051560"/>
-          </a:xfrm>
-          <a:prstGeom prst="rect">
-            <a:avLst/>
-          </a:prstGeom>
-          <a:noFill/>
-          <a:ln/>
-        </p:spPr>
-        <p:txBody>
-          <a:bodyPr wrap="square" lIns="0" tIns="0" rIns="0" bIns="0" rtlCol="0" anchor="ctr"/>
+            <a:off x="1033272" y="2962656"/>
+            <a:ext cx="4532224" cy="1188720"/>
+          </a:xfrm>
+          <a:prstGeom prst="rect">
+            <a:avLst/>
+          </a:prstGeom>
+          <a:noFill/>
+          <a:ln/>
+        </p:spPr>
+        <p:txBody>
+          <a:bodyPr wrap="square" lIns="0" tIns="0" rIns="0" bIns="0" rtlCol="0" anchor="t"/>
           <a:lstStyle/>
           <a:p>
             <a:pPr indent="0" marL="0">
@@ -11107,11 +11110,11 @@
         <p:spPr>
           <a:xfrm>
             <a:off x="6278728" y="1965960"/>
-            <a:ext cx="5227168" cy="2286000"/>
+            <a:ext cx="5227168" cy="2377440"/>
           </a:xfrm>
           <a:prstGeom prst="roundRect">
             <a:avLst>
-              <a:gd name="adj" fmla="val 3600"/>
+              <a:gd name="adj" fmla="val 3462"/>
             </a:avLst>
           </a:prstGeom>
           <a:solidFill>
@@ -11128,7 +11131,7 @@
         </p:nvSpPr>
         <p:spPr>
           <a:xfrm>
-            <a:off x="6626200" y="2267712"/>
+            <a:off x="6626200" y="2249424"/>
             <a:ext cx="566928" cy="566928"/>
           </a:xfrm>
           <a:prstGeom prst="ellipse">
@@ -11156,7 +11159,7 @@
         </p:blipFill>
         <p:spPr>
           <a:xfrm>
-            <a:off x="6767932" y="2409444"/>
+            <a:off x="6767932" y="2391156"/>
             <a:ext cx="283464" cy="283464"/>
           </a:xfrm>
           <a:prstGeom prst="rect">
@@ -11172,8 +11175,8 @@
         </p:nvSpPr>
         <p:spPr>
           <a:xfrm>
-            <a:off x="7321144" y="2212848"/>
-            <a:ext cx="3855568" cy="512064"/>
+            <a:off x="7321144" y="2231136"/>
+            <a:ext cx="3855568" cy="603504"/>
           </a:xfrm>
           <a:prstGeom prst="rect">
             <a:avLst/>
@@ -11214,17 +11217,17 @@
         </p:nvSpPr>
         <p:spPr>
           <a:xfrm>
-            <a:off x="6626200" y="2999232"/>
-            <a:ext cx="4532224" cy="1051560"/>
-          </a:xfrm>
-          <a:prstGeom prst="rect">
-            <a:avLst/>
-          </a:prstGeom>
-          <a:noFill/>
-          <a:ln/>
-        </p:spPr>
-        <p:txBody>
-          <a:bodyPr wrap="square" lIns="0" tIns="0" rIns="0" bIns="0" rtlCol="0" anchor="ctr"/>
+            <a:off x="6626200" y="2962656"/>
+            <a:ext cx="4532224" cy="1188720"/>
+          </a:xfrm>
+          <a:prstGeom prst="rect">
+            <a:avLst/>
+          </a:prstGeom>
+          <a:noFill/>
+          <a:ln/>
+        </p:spPr>
+        <p:txBody>
+          <a:bodyPr wrap="square" lIns="0" tIns="0" rIns="0" bIns="0" rtlCol="0" anchor="t"/>
           <a:lstStyle/>
           <a:p>
             <a:pPr indent="0" marL="0">
@@ -11256,7 +11259,7 @@
         </p:nvSpPr>
         <p:spPr>
           <a:xfrm>
-            <a:off x="685800" y="4572000"/>
+            <a:off x="685800" y="4535424"/>
             <a:ext cx="10820095" cy="0"/>
           </a:xfrm>
           <a:prstGeom prst="line">
@@ -11279,7 +11282,7 @@
         </p:nvSpPr>
         <p:spPr>
           <a:xfrm>
-            <a:off x="685800" y="4754880"/>
+            <a:off x="685800" y="4681728"/>
             <a:ext cx="5486400" cy="219456"/>
           </a:xfrm>
           <a:prstGeom prst="rect">
@@ -11326,7 +11329,7 @@
         </p:blipFill>
         <p:spPr>
           <a:xfrm>
-            <a:off x="685800" y="5102352"/>
+            <a:off x="685800" y="4956048"/>
             <a:ext cx="365760" cy="365760"/>
           </a:xfrm>
           <a:prstGeom prst="rect">
@@ -11342,7 +11345,7 @@
         </p:nvSpPr>
         <p:spPr>
           <a:xfrm>
-            <a:off x="685800" y="5559552"/>
+            <a:off x="685800" y="5413248"/>
             <a:ext cx="3362858" cy="274320"/>
           </a:xfrm>
           <a:prstGeom prst="rect">
@@ -11381,17 +11384,17 @@
         </p:nvSpPr>
         <p:spPr>
           <a:xfrm>
-            <a:off x="685800" y="5852160"/>
-            <a:ext cx="3362858" cy="594360"/>
-          </a:xfrm>
-          <a:prstGeom prst="rect">
-            <a:avLst/>
-          </a:prstGeom>
-          <a:noFill/>
-          <a:ln/>
-        </p:spPr>
-        <p:txBody>
-          <a:bodyPr wrap="square" lIns="0" tIns="0" rIns="0" bIns="0" rtlCol="0" anchor="ctr"/>
+            <a:off x="685800" y="5705856"/>
+            <a:ext cx="3362858" cy="694944"/>
+          </a:xfrm>
+          <a:prstGeom prst="rect">
+            <a:avLst/>
+          </a:prstGeom>
+          <a:noFill/>
+          <a:ln/>
+        </p:spPr>
+        <p:txBody>
+          <a:bodyPr wrap="square" lIns="0" tIns="0" rIns="0" bIns="0" rtlCol="0" anchor="t"/>
           <a:lstStyle/>
           <a:p>
             <a:pPr indent="0" marL="0">
@@ -11431,7 +11434,7 @@
         </p:blipFill>
         <p:spPr>
           <a:xfrm>
-            <a:off x="4414418" y="5102352"/>
+            <a:off x="4414418" y="4956048"/>
             <a:ext cx="365760" cy="365760"/>
           </a:xfrm>
           <a:prstGeom prst="rect">
@@ -11447,7 +11450,7 @@
         </p:nvSpPr>
         <p:spPr>
           <a:xfrm>
-            <a:off x="4414418" y="5559552"/>
+            <a:off x="4414418" y="5413248"/>
             <a:ext cx="3362858" cy="274320"/>
           </a:xfrm>
           <a:prstGeom prst="rect">
@@ -11486,17 +11489,17 @@
         </p:nvSpPr>
         <p:spPr>
           <a:xfrm>
-            <a:off x="4414418" y="5852160"/>
-            <a:ext cx="3362858" cy="594360"/>
-          </a:xfrm>
-          <a:prstGeom prst="rect">
-            <a:avLst/>
-          </a:prstGeom>
-          <a:noFill/>
-          <a:ln/>
-        </p:spPr>
-        <p:txBody>
-          <a:bodyPr wrap="square" lIns="0" tIns="0" rIns="0" bIns="0" rtlCol="0" anchor="ctr"/>
+            <a:off x="4414418" y="5705856"/>
+            <a:ext cx="3362858" cy="694944"/>
+          </a:xfrm>
+          <a:prstGeom prst="rect">
+            <a:avLst/>
+          </a:prstGeom>
+          <a:noFill/>
+          <a:ln/>
+        </p:spPr>
+        <p:txBody>
+          <a:bodyPr wrap="square" lIns="0" tIns="0" rIns="0" bIns="0" rtlCol="0" anchor="t"/>
           <a:lstStyle/>
           <a:p>
             <a:pPr indent="0" marL="0">
@@ -11536,7 +11539,7 @@
         </p:blipFill>
         <p:spPr>
           <a:xfrm>
-            <a:off x="8143037" y="5102352"/>
+            <a:off x="8143037" y="4956048"/>
             <a:ext cx="365760" cy="365760"/>
           </a:xfrm>
           <a:prstGeom prst="rect">
@@ -11552,7 +11555,7 @@
         </p:nvSpPr>
         <p:spPr>
           <a:xfrm>
-            <a:off x="8143037" y="5559552"/>
+            <a:off x="8143037" y="5413248"/>
             <a:ext cx="3362858" cy="274320"/>
           </a:xfrm>
           <a:prstGeom prst="rect">
@@ -11591,17 +11594,17 @@
         </p:nvSpPr>
         <p:spPr>
           <a:xfrm>
-            <a:off x="8143037" y="5852160"/>
-            <a:ext cx="3362858" cy="594360"/>
-          </a:xfrm>
-          <a:prstGeom prst="rect">
-            <a:avLst/>
-          </a:prstGeom>
-          <a:noFill/>
-          <a:ln/>
-        </p:spPr>
-        <p:txBody>
-          <a:bodyPr wrap="square" lIns="0" tIns="0" rIns="0" bIns="0" rtlCol="0" anchor="ctr"/>
+            <a:off x="8143037" y="5705856"/>
+            <a:ext cx="3362858" cy="694944"/>
+          </a:xfrm>
+          <a:prstGeom prst="rect">
+            <a:avLst/>
+          </a:prstGeom>
+          <a:noFill/>
+          <a:ln/>
+        </p:spPr>
+        <p:txBody>
+          <a:bodyPr wrap="square" lIns="0" tIns="0" rIns="0" bIns="0" rtlCol="0" anchor="t"/>
           <a:lstStyle/>
           <a:p>
             <a:pPr indent="0" marL="0">
